--- a/data/ProjectPresentation.pptx
+++ b/data/ProjectPresentation.pptx
@@ -1605,46 +1605,6 @@
         <p:txBody>
           <a:bodyPr/>
           <a:lstStyle/>
-          <a:p>
-            <a:pPr marL="285750" indent="-285750">
-              <a:buFont typeface="Arial" panose="020B0604020202020204" pitchFamily="34" charset="0"/>
-              <a:buChar char="•"/>
-            </a:pPr>
-            <a:r>
-              <a:rPr lang="en-US" sz="1200" dirty="0"/>
-              <a:t>Using z-score to identify 3323 outlier cells (|z| &gt; 3) in eight </a:t>
-            </a:r>
-            <a:r>
-              <a:rPr lang="en-US" sz="1200" dirty="0" err="1"/>
-              <a:t>x_cols</a:t>
-            </a:r>
-            <a:endParaRPr lang="en-US" sz="1200" dirty="0"/>
-          </a:p>
-          <a:p>
-            <a:pPr marL="285750" indent="-285750">
-              <a:buFont typeface="Arial" panose="020B0604020202020204" pitchFamily="34" charset="0"/>
-              <a:buChar char="•"/>
-            </a:pPr>
-            <a:r>
-              <a:rPr lang="en-US" sz="1200" dirty="0"/>
-              <a:t>Replaced with </a:t>
-            </a:r>
-            <a:r>
-              <a:rPr lang="en-US" sz="1200" dirty="0" err="1"/>
-              <a:t>NaN</a:t>
-            </a:r>
-            <a:endParaRPr lang="en-US" sz="1200" dirty="0"/>
-          </a:p>
-          <a:p>
-            <a:pPr marL="285750" indent="-285750">
-              <a:buFont typeface="Arial" panose="020B0604020202020204" pitchFamily="34" charset="0"/>
-              <a:buChar char="•"/>
-            </a:pPr>
-            <a:r>
-              <a:rPr lang="en-US" sz="1200" dirty="0"/>
-              <a:t>imputed values back with MICE (KNN runs the server out of RAM)</a:t>
-            </a:r>
-          </a:p>
           <a:p>
             <a:endParaRPr lang="en-US" dirty="0"/>
           </a:p>
@@ -14348,24 +14308,20 @@
           <a:lstStyle/>
           <a:p>
             <a:r>
-              <a:rPr lang="en-US" b="1" dirty="0" err="1"/>
-              <a:t>track_popularity</a:t>
-            </a:r>
-            <a:r>
-              <a:rPr lang="en-US" b="1" dirty="0"/>
-              <a:t>  </a:t>
-            </a:r>
-            <a:r>
-              <a:rPr lang="en-US" dirty="0"/>
-              <a:t>(</a:t>
-            </a:r>
-            <a:r>
               <a:rPr lang="en-US" dirty="0" err="1"/>
               <a:t>y_col</a:t>
             </a:r>
             <a:r>
               <a:rPr lang="en-US" dirty="0"/>
-              <a:t>)</a:t>
+              <a:t> (target) </a:t>
+            </a:r>
+            <a:r>
+              <a:rPr lang="en-US" b="1" dirty="0"/>
+              <a:t>: </a:t>
+            </a:r>
+            <a:r>
+              <a:rPr lang="en-US" b="1" dirty="0" err="1"/>
+              <a:t>track_popularity</a:t>
             </a:r>
             <a:endParaRPr lang="en-US" b="1" dirty="0"/>
           </a:p>
@@ -19739,21 +19695,21 @@
           <p:nvPr>
             <p:extLst>
               <p:ext uri="{D42A27DB-BD31-4B8C-83A1-F6EECF244321}">
-                <p14:modId xmlns:p14="http://schemas.microsoft.com/office/powerpoint/2010/main" val="2323510367"/>
+                <p14:modId xmlns:p14="http://schemas.microsoft.com/office/powerpoint/2010/main" val="3747790793"/>
               </p:ext>
             </p:extLst>
           </p:nvPr>
         </p:nvGraphicFramePr>
         <p:xfrm>
           <a:off x="582773" y="2870715"/>
-          <a:ext cx="4393280" cy="2420986"/>
+          <a:ext cx="4445414" cy="2420986"/>
         </p:xfrm>
         <a:graphic>
           <a:graphicData uri="http://schemas.openxmlformats.org/drawingml/2006/table">
             <a:tbl>
               <a:tblPr/>
               <a:tblGrid>
-                <a:gridCol w="2361999">
+                <a:gridCol w="2414133">
                   <a:extLst>
                     <a:ext uri="{9D8B030D-6E8A-4147-A177-3AD203B41FA5}">
                       <a16:colId xmlns:a16="http://schemas.microsoft.com/office/drawing/2014/main" val="3198127120"/>
@@ -19800,7 +19756,7 @@
                           <a:ea typeface="+mn-ea"/>
                           <a:cs typeface="+mn-cs"/>
                         </a:rPr>
-                        <a:t>with-outlier, without, Impute</a:t>
+                        <a:t>with-outliers, without, Impute</a:t>
                       </a:r>
                     </a:p>
                   </a:txBody>

--- a/data/ProjectPresentation.pptx
+++ b/data/ProjectPresentation.pptx
@@ -211,7 +211,7 @@
           <a:p>
             <a:fld id="{68E98696-75F9-40E3-8568-A53F1E8D9C90}" type="datetimeFigureOut">
               <a:rPr lang="en-US" smtClean="0"/>
-              <a:t>11/12/2025</a:t>
+              <a:t>11/13/2025</a:t>
             </a:fld>
             <a:endParaRPr lang="en-US"/>
           </a:p>
@@ -2123,7 +2123,7 @@
           <a:p>
             <a:fld id="{49C6D569-90E7-4797-AB93-B35AA207B764}" type="datetimeFigureOut">
               <a:rPr lang="en-US" smtClean="0"/>
-              <a:t>11/12/2025</a:t>
+              <a:t>11/13/2025</a:t>
             </a:fld>
             <a:endParaRPr lang="en-US"/>
           </a:p>
@@ -2321,7 +2321,7 @@
           <a:p>
             <a:fld id="{49C6D569-90E7-4797-AB93-B35AA207B764}" type="datetimeFigureOut">
               <a:rPr lang="en-US" smtClean="0"/>
-              <a:t>11/12/2025</a:t>
+              <a:t>11/13/2025</a:t>
             </a:fld>
             <a:endParaRPr lang="en-US"/>
           </a:p>
@@ -2529,7 +2529,7 @@
           <a:p>
             <a:fld id="{49C6D569-90E7-4797-AB93-B35AA207B764}" type="datetimeFigureOut">
               <a:rPr lang="en-US" smtClean="0"/>
-              <a:t>11/12/2025</a:t>
+              <a:t>11/13/2025</a:t>
             </a:fld>
             <a:endParaRPr lang="en-US"/>
           </a:p>
@@ -2727,7 +2727,7 @@
           <a:p>
             <a:fld id="{49C6D569-90E7-4797-AB93-B35AA207B764}" type="datetimeFigureOut">
               <a:rPr lang="en-US" smtClean="0"/>
-              <a:t>11/12/2025</a:t>
+              <a:t>11/13/2025</a:t>
             </a:fld>
             <a:endParaRPr lang="en-US"/>
           </a:p>
@@ -3002,7 +3002,7 @@
           <a:p>
             <a:fld id="{49C6D569-90E7-4797-AB93-B35AA207B764}" type="datetimeFigureOut">
               <a:rPr lang="en-US" smtClean="0"/>
-              <a:t>11/12/2025</a:t>
+              <a:t>11/13/2025</a:t>
             </a:fld>
             <a:endParaRPr lang="en-US"/>
           </a:p>
@@ -3267,7 +3267,7 @@
           <a:p>
             <a:fld id="{49C6D569-90E7-4797-AB93-B35AA207B764}" type="datetimeFigureOut">
               <a:rPr lang="en-US" smtClean="0"/>
-              <a:t>11/12/2025</a:t>
+              <a:t>11/13/2025</a:t>
             </a:fld>
             <a:endParaRPr lang="en-US"/>
           </a:p>
@@ -3679,7 +3679,7 @@
           <a:p>
             <a:fld id="{49C6D569-90E7-4797-AB93-B35AA207B764}" type="datetimeFigureOut">
               <a:rPr lang="en-US" smtClean="0"/>
-              <a:t>11/12/2025</a:t>
+              <a:t>11/13/2025</a:t>
             </a:fld>
             <a:endParaRPr lang="en-US"/>
           </a:p>
@@ -3820,7 +3820,7 @@
           <a:p>
             <a:fld id="{49C6D569-90E7-4797-AB93-B35AA207B764}" type="datetimeFigureOut">
               <a:rPr lang="en-US" smtClean="0"/>
-              <a:t>11/12/2025</a:t>
+              <a:t>11/13/2025</a:t>
             </a:fld>
             <a:endParaRPr lang="en-US"/>
           </a:p>
@@ -3933,7 +3933,7 @@
           <a:p>
             <a:fld id="{49C6D569-90E7-4797-AB93-B35AA207B764}" type="datetimeFigureOut">
               <a:rPr lang="en-US" smtClean="0"/>
-              <a:t>11/12/2025</a:t>
+              <a:t>11/13/2025</a:t>
             </a:fld>
             <a:endParaRPr lang="en-US"/>
           </a:p>
@@ -4244,7 +4244,7 @@
           <a:p>
             <a:fld id="{49C6D569-90E7-4797-AB93-B35AA207B764}" type="datetimeFigureOut">
               <a:rPr lang="en-US" smtClean="0"/>
-              <a:t>11/12/2025</a:t>
+              <a:t>11/13/2025</a:t>
             </a:fld>
             <a:endParaRPr lang="en-US"/>
           </a:p>
@@ -4532,7 +4532,7 @@
           <a:p>
             <a:fld id="{49C6D569-90E7-4797-AB93-B35AA207B764}" type="datetimeFigureOut">
               <a:rPr lang="en-US" smtClean="0"/>
-              <a:t>11/12/2025</a:t>
+              <a:t>11/13/2025</a:t>
             </a:fld>
             <a:endParaRPr lang="en-US"/>
           </a:p>
@@ -4773,7 +4773,7 @@
           <a:p>
             <a:fld id="{49C6D569-90E7-4797-AB93-B35AA207B764}" type="datetimeFigureOut">
               <a:rPr lang="en-US" smtClean="0"/>
-              <a:t>11/12/2025</a:t>
+              <a:t>11/13/2025</a:t>
             </a:fld>
             <a:endParaRPr lang="en-US"/>
           </a:p>
